--- a/CCF_Orientation_Deck.pptx
+++ b/CCF_Orientation_Deck.pptx
@@ -1830,9 +1830,32 @@
           <a:ln/>
         </p:spPr>
       </p:sp>
-      <p:sp>
-        <p:nvSpPr>
-          <p:cNvPr id="5" name="Text 2"/>
+      <p:pic>
+        <p:nvPicPr>
+          <p:cNvPr id="5" name="Image 1" descr="/tmp/ccf_images/logo.jpg">    </p:cNvPr>
+          <p:cNvPicPr>
+            <a:picLocks noChangeAspect="1"/>
+          </p:cNvPicPr>
+          <p:nvPr/>
+        </p:nvPicPr>
+        <p:blipFill>
+          <a:blip r:embed="rId2"/>
+          <a:srcRect l="0" r="0" t="0" b="0"/>
+          <a:stretch/>
+        </p:blipFill>
+        <p:spPr>
+          <a:xfrm>
+            <a:off x="731520" y="548640"/>
+            <a:ext cx="2011680" cy="731520"/>
+          </a:xfrm>
+          <a:prstGeom prst="rect">
+            <a:avLst/>
+          </a:prstGeom>
+        </p:spPr>
+      </p:pic>
+      <p:sp>
+        <p:nvSpPr>
+          <p:cNvPr id="6" name="Text 2"/>
           <p:cNvSpPr/>
           <p:nvPr/>
         </p:nvSpPr>
@@ -1871,7 +1894,7 @@
       </p:sp>
       <p:sp>
         <p:nvSpPr>
-          <p:cNvPr id="6" name="Text 3"/>
+          <p:cNvPr id="7" name="Text 3"/>
           <p:cNvSpPr/>
           <p:nvPr/>
         </p:nvSpPr>
@@ -1933,7 +1956,7 @@
       </p:sp>
       <p:sp>
         <p:nvSpPr>
-          <p:cNvPr id="7" name="Shape 4"/>
+          <p:cNvPr id="8" name="Shape 4"/>
           <p:cNvSpPr/>
           <p:nvPr/>
         </p:nvSpPr>
@@ -1964,7 +1987,7 @@
       </p:sp>
       <p:sp>
         <p:nvSpPr>
-          <p:cNvPr id="8" name="Text 5"/>
+          <p:cNvPr id="9" name="Text 5"/>
           <p:cNvSpPr/>
           <p:nvPr/>
         </p:nvSpPr>
@@ -2003,7 +2026,7 @@
       </p:sp>
       <p:sp>
         <p:nvSpPr>
-          <p:cNvPr id="9" name="Shape 6"/>
+          <p:cNvPr id="10" name="Shape 6"/>
           <p:cNvSpPr/>
           <p:nvPr/>
         </p:nvSpPr>
@@ -2034,7 +2057,7 @@
       </p:sp>
       <p:sp>
         <p:nvSpPr>
-          <p:cNvPr id="10" name="Text 7"/>
+          <p:cNvPr id="11" name="Text 7"/>
           <p:cNvSpPr/>
           <p:nvPr/>
         </p:nvSpPr>
@@ -2073,7 +2096,7 @@
       </p:sp>
       <p:sp>
         <p:nvSpPr>
-          <p:cNvPr id="11" name="Shape 8"/>
+          <p:cNvPr id="12" name="Shape 8"/>
           <p:cNvSpPr/>
           <p:nvPr/>
         </p:nvSpPr>
@@ -2104,7 +2127,7 @@
       </p:sp>
       <p:sp>
         <p:nvSpPr>
-          <p:cNvPr id="12" name="Text 9"/>
+          <p:cNvPr id="13" name="Text 9"/>
           <p:cNvSpPr/>
           <p:nvPr/>
         </p:nvSpPr>
@@ -2143,7 +2166,7 @@
       </p:sp>
       <p:sp>
         <p:nvSpPr>
-          <p:cNvPr id="13" name="Shape 10"/>
+          <p:cNvPr id="14" name="Shape 10"/>
           <p:cNvSpPr/>
           <p:nvPr/>
         </p:nvSpPr>
@@ -2174,7 +2197,7 @@
       </p:sp>
       <p:sp>
         <p:nvSpPr>
-          <p:cNvPr id="14" name="Text 11"/>
+          <p:cNvPr id="15" name="Text 11"/>
           <p:cNvSpPr/>
           <p:nvPr/>
         </p:nvSpPr>
@@ -2205,7 +2228,7 @@
                 <a:ea typeface="Calibri" pitchFamily="34" charset="-122"/>
                 <a:cs typeface="Calibri" pitchFamily="34" charset="-120"/>
               </a:rPr>
-              <a:t>50+ Yrs Experience</a:t>
+              <a:t>Real Leads · Real Commissions</a:t>
             </a:r>
             <a:endParaRPr lang="en-US" sz="800" dirty="0"/>
           </a:p>
@@ -4409,7 +4432,7 @@
                 <a:ea typeface="Courier New" pitchFamily="34" charset="-122"/>
                 <a:cs typeface="Courier New" pitchFamily="34" charset="-120"/>
               </a:rPr>
-              <a:t>Complete Custom Fence · New Hire Orientation Kit · 2025</a:t>
+              <a:t>Complete Custom Fence · New Hire Orientation Kit · 2026</a:t>
             </a:r>
             <a:endParaRPr lang="en-US" sz="700" dirty="0"/>
           </a:p>
@@ -4934,7 +4957,7 @@
                 <a:ea typeface="Calibri" pitchFamily="34" charset="-122"/>
                 <a:cs typeface="Calibri" pitchFamily="34" charset="-120"/>
               </a:rPr>
-              <a:t>This kit isn't a rulebook. It's a roadmap. Read it. Ask questions. The people around you have been doing this a long time and they will set you up to succeed.</a:t>
+              <a:t>If you're in sales, here's what I want you to know: the hardest part of selling is already done. We spent 20 years building a reputation that homeowners trust before you ever knock on their door. Lifetime warranty, American-made materials, five-star reviews you can pull up on your phone at the kitchen table.</a:t>
             </a:r>
             <a:endParaRPr lang="en-US" sz="1200" dirty="0"/>
           </a:p>
